--- a/assets/template-pptx.pptx
+++ b/assets/template-pptx.pptx
@@ -5813,7 +5813,7 @@
       </p:sp>
       <p:graphicFrame xmlns:a="http://schemas.openxmlformats.org/drawingml/2006/main" xmlns:r="http://schemas.openxmlformats.org/officeDocument/2006/relationships" xmlns:p="http://schemas.openxmlformats.org/presentationml/2006/main">
         <p:nvGraphicFramePr>
-          <p:cNvPr id="138971037" name=""/>
+          <p:cNvPr id="112603286" name=""/>
           <p:cNvGraphicFramePr>
             <a:graphicFrameLocks noGrp="true"/>
           </p:cNvGraphicFramePr>

--- a/assets/template-pptx.pptx
+++ b/assets/template-pptx.pptx
@@ -5813,7 +5813,7 @@
       </p:sp>
       <p:graphicFrame xmlns:a="http://schemas.openxmlformats.org/drawingml/2006/main" xmlns:r="http://schemas.openxmlformats.org/officeDocument/2006/relationships" xmlns:p="http://schemas.openxmlformats.org/presentationml/2006/main">
         <p:nvGraphicFramePr>
-          <p:cNvPr id="112603286" name=""/>
+          <p:cNvPr id="658360317" name=""/>
           <p:cNvGraphicFramePr>
             <a:graphicFrameLocks noGrp="true"/>
           </p:cNvGraphicFramePr>

--- a/assets/template-pptx.pptx
+++ b/assets/template-pptx.pptx
@@ -5813,7 +5813,7 @@
       </p:sp>
       <p:graphicFrame xmlns:a="http://schemas.openxmlformats.org/drawingml/2006/main" xmlns:r="http://schemas.openxmlformats.org/officeDocument/2006/relationships" xmlns:p="http://schemas.openxmlformats.org/presentationml/2006/main">
         <p:nvGraphicFramePr>
-          <p:cNvPr id="658360317" name=""/>
+          <p:cNvPr id="344566277" name=""/>
           <p:cNvGraphicFramePr>
             <a:graphicFrameLocks noGrp="true"/>
           </p:cNvGraphicFramePr>

--- a/assets/template-pptx.pptx
+++ b/assets/template-pptx.pptx
@@ -5813,7 +5813,7 @@
       </p:sp>
       <p:graphicFrame xmlns:a="http://schemas.openxmlformats.org/drawingml/2006/main" xmlns:r="http://schemas.openxmlformats.org/officeDocument/2006/relationships" xmlns:p="http://schemas.openxmlformats.org/presentationml/2006/main">
         <p:nvGraphicFramePr>
-          <p:cNvPr id="344566277" name=""/>
+          <p:cNvPr id="360767888" name=""/>
           <p:cNvGraphicFramePr>
             <a:graphicFrameLocks noGrp="true"/>
           </p:cNvGraphicFramePr>

--- a/assets/template-pptx.pptx
+++ b/assets/template-pptx.pptx
@@ -5813,7 +5813,7 @@
       </p:sp>
       <p:graphicFrame xmlns:a="http://schemas.openxmlformats.org/drawingml/2006/main" xmlns:r="http://schemas.openxmlformats.org/officeDocument/2006/relationships" xmlns:p="http://schemas.openxmlformats.org/presentationml/2006/main">
         <p:nvGraphicFramePr>
-          <p:cNvPr id="360767888" name=""/>
+          <p:cNvPr id="603299473" name=""/>
           <p:cNvGraphicFramePr>
             <a:graphicFrameLocks noGrp="true"/>
           </p:cNvGraphicFramePr>

--- a/assets/template-pptx.pptx
+++ b/assets/template-pptx.pptx
@@ -5813,7 +5813,7 @@
       </p:sp>
       <p:graphicFrame xmlns:a="http://schemas.openxmlformats.org/drawingml/2006/main" xmlns:r="http://schemas.openxmlformats.org/officeDocument/2006/relationships" xmlns:p="http://schemas.openxmlformats.org/presentationml/2006/main">
         <p:nvGraphicFramePr>
-          <p:cNvPr id="603299473" name=""/>
+          <p:cNvPr id="906295819" name=""/>
           <p:cNvGraphicFramePr>
             <a:graphicFrameLocks noGrp="true"/>
           </p:cNvGraphicFramePr>

--- a/assets/template-pptx.pptx
+++ b/assets/template-pptx.pptx
@@ -5813,7 +5813,7 @@
       </p:sp>
       <p:graphicFrame xmlns:a="http://schemas.openxmlformats.org/drawingml/2006/main" xmlns:r="http://schemas.openxmlformats.org/officeDocument/2006/relationships" xmlns:p="http://schemas.openxmlformats.org/presentationml/2006/main">
         <p:nvGraphicFramePr>
-          <p:cNvPr id="906295819" name=""/>
+          <p:cNvPr id="217641197" name=""/>
           <p:cNvGraphicFramePr>
             <a:graphicFrameLocks noGrp="true"/>
           </p:cNvGraphicFramePr>

--- a/assets/template-pptx.pptx
+++ b/assets/template-pptx.pptx
@@ -5813,7 +5813,7 @@
       </p:sp>
       <p:graphicFrame xmlns:a="http://schemas.openxmlformats.org/drawingml/2006/main" xmlns:r="http://schemas.openxmlformats.org/officeDocument/2006/relationships" xmlns:p="http://schemas.openxmlformats.org/presentationml/2006/main">
         <p:nvGraphicFramePr>
-          <p:cNvPr id="217641197" name=""/>
+          <p:cNvPr id="411957780" name=""/>
           <p:cNvGraphicFramePr>
             <a:graphicFrameLocks noGrp="true"/>
           </p:cNvGraphicFramePr>

--- a/assets/template-pptx.pptx
+++ b/assets/template-pptx.pptx
@@ -5813,7 +5813,7 @@
       </p:sp>
       <p:graphicFrame xmlns:a="http://schemas.openxmlformats.org/drawingml/2006/main" xmlns:r="http://schemas.openxmlformats.org/officeDocument/2006/relationships" xmlns:p="http://schemas.openxmlformats.org/presentationml/2006/main">
         <p:nvGraphicFramePr>
-          <p:cNvPr id="411957780" name=""/>
+          <p:cNvPr id="546095859" name=""/>
           <p:cNvGraphicFramePr>
             <a:graphicFrameLocks noGrp="true"/>
           </p:cNvGraphicFramePr>

--- a/assets/template-pptx.pptx
+++ b/assets/template-pptx.pptx
@@ -5813,7 +5813,7 @@
       </p:sp>
       <p:graphicFrame xmlns:a="http://schemas.openxmlformats.org/drawingml/2006/main" xmlns:r="http://schemas.openxmlformats.org/officeDocument/2006/relationships" xmlns:p="http://schemas.openxmlformats.org/presentationml/2006/main">
         <p:nvGraphicFramePr>
-          <p:cNvPr id="546095859" name=""/>
+          <p:cNvPr id="653192803" name=""/>
           <p:cNvGraphicFramePr>
             <a:graphicFrameLocks noGrp="true"/>
           </p:cNvGraphicFramePr>

--- a/assets/template-pptx.pptx
+++ b/assets/template-pptx.pptx
@@ -5813,7 +5813,7 @@
       </p:sp>
       <p:graphicFrame xmlns:a="http://schemas.openxmlformats.org/drawingml/2006/main" xmlns:r="http://schemas.openxmlformats.org/officeDocument/2006/relationships" xmlns:p="http://schemas.openxmlformats.org/presentationml/2006/main">
         <p:nvGraphicFramePr>
-          <p:cNvPr id="653192803" name=""/>
+          <p:cNvPr id="557139079" name=""/>
           <p:cNvGraphicFramePr>
             <a:graphicFrameLocks noGrp="true"/>
           </p:cNvGraphicFramePr>

--- a/assets/template-pptx.pptx
+++ b/assets/template-pptx.pptx
@@ -5813,7 +5813,7 @@
       </p:sp>
       <p:graphicFrame xmlns:a="http://schemas.openxmlformats.org/drawingml/2006/main" xmlns:r="http://schemas.openxmlformats.org/officeDocument/2006/relationships" xmlns:p="http://schemas.openxmlformats.org/presentationml/2006/main">
         <p:nvGraphicFramePr>
-          <p:cNvPr id="557139079" name=""/>
+          <p:cNvPr id="121101560" name=""/>
           <p:cNvGraphicFramePr>
             <a:graphicFrameLocks noGrp="true"/>
           </p:cNvGraphicFramePr>

--- a/assets/template-pptx.pptx
+++ b/assets/template-pptx.pptx
@@ -5813,7 +5813,7 @@
       </p:sp>
       <p:graphicFrame xmlns:a="http://schemas.openxmlformats.org/drawingml/2006/main" xmlns:r="http://schemas.openxmlformats.org/officeDocument/2006/relationships" xmlns:p="http://schemas.openxmlformats.org/presentationml/2006/main">
         <p:nvGraphicFramePr>
-          <p:cNvPr id="121101560" name=""/>
+          <p:cNvPr id="556287715" name=""/>
           <p:cNvGraphicFramePr>
             <a:graphicFrameLocks noGrp="true"/>
           </p:cNvGraphicFramePr>

--- a/assets/template-pptx.pptx
+++ b/assets/template-pptx.pptx
@@ -5813,7 +5813,7 @@
       </p:sp>
       <p:graphicFrame xmlns:a="http://schemas.openxmlformats.org/drawingml/2006/main" xmlns:r="http://schemas.openxmlformats.org/officeDocument/2006/relationships" xmlns:p="http://schemas.openxmlformats.org/presentationml/2006/main">
         <p:nvGraphicFramePr>
-          <p:cNvPr id="556287715" name=""/>
+          <p:cNvPr id="720778968" name=""/>
           <p:cNvGraphicFramePr>
             <a:graphicFrameLocks noGrp="true"/>
           </p:cNvGraphicFramePr>

--- a/assets/template-pptx.pptx
+++ b/assets/template-pptx.pptx
@@ -5813,7 +5813,7 @@
       </p:sp>
       <p:graphicFrame xmlns:a="http://schemas.openxmlformats.org/drawingml/2006/main" xmlns:r="http://schemas.openxmlformats.org/officeDocument/2006/relationships" xmlns:p="http://schemas.openxmlformats.org/presentationml/2006/main">
         <p:nvGraphicFramePr>
-          <p:cNvPr id="720778968" name=""/>
+          <p:cNvPr id="465221379" name=""/>
           <p:cNvGraphicFramePr>
             <a:graphicFrameLocks noGrp="true"/>
           </p:cNvGraphicFramePr>

--- a/assets/template-pptx.pptx
+++ b/assets/template-pptx.pptx
@@ -5813,7 +5813,7 @@
       </p:sp>
       <p:graphicFrame xmlns:a="http://schemas.openxmlformats.org/drawingml/2006/main" xmlns:r="http://schemas.openxmlformats.org/officeDocument/2006/relationships" xmlns:p="http://schemas.openxmlformats.org/presentationml/2006/main">
         <p:nvGraphicFramePr>
-          <p:cNvPr id="465221379" name=""/>
+          <p:cNvPr id="831610332" name=""/>
           <p:cNvGraphicFramePr>
             <a:graphicFrameLocks noGrp="true"/>
           </p:cNvGraphicFramePr>

--- a/assets/template-pptx.pptx
+++ b/assets/template-pptx.pptx
@@ -5813,7 +5813,7 @@
       </p:sp>
       <p:graphicFrame xmlns:a="http://schemas.openxmlformats.org/drawingml/2006/main" xmlns:r="http://schemas.openxmlformats.org/officeDocument/2006/relationships" xmlns:p="http://schemas.openxmlformats.org/presentationml/2006/main">
         <p:nvGraphicFramePr>
-          <p:cNvPr id="831610332" name=""/>
+          <p:cNvPr id="546980634" name=""/>
           <p:cNvGraphicFramePr>
             <a:graphicFrameLocks noGrp="true"/>
           </p:cNvGraphicFramePr>

--- a/assets/template-pptx.pptx
+++ b/assets/template-pptx.pptx
@@ -5813,7 +5813,7 @@
       </p:sp>
       <p:graphicFrame xmlns:a="http://schemas.openxmlformats.org/drawingml/2006/main" xmlns:r="http://schemas.openxmlformats.org/officeDocument/2006/relationships" xmlns:p="http://schemas.openxmlformats.org/presentationml/2006/main">
         <p:nvGraphicFramePr>
-          <p:cNvPr id="546980634" name=""/>
+          <p:cNvPr id="77546216" name=""/>
           <p:cNvGraphicFramePr>
             <a:graphicFrameLocks noGrp="true"/>
           </p:cNvGraphicFramePr>

--- a/assets/template-pptx.pptx
+++ b/assets/template-pptx.pptx
@@ -5813,7 +5813,7 @@
       </p:sp>
       <p:graphicFrame xmlns:a="http://schemas.openxmlformats.org/drawingml/2006/main" xmlns:r="http://schemas.openxmlformats.org/officeDocument/2006/relationships" xmlns:p="http://schemas.openxmlformats.org/presentationml/2006/main">
         <p:nvGraphicFramePr>
-          <p:cNvPr id="77546216" name=""/>
+          <p:cNvPr id="759875522" name=""/>
           <p:cNvGraphicFramePr>
             <a:graphicFrameLocks noGrp="true"/>
           </p:cNvGraphicFramePr>

--- a/assets/template-pptx.pptx
+++ b/assets/template-pptx.pptx
@@ -5813,7 +5813,7 @@
       </p:sp>
       <p:graphicFrame xmlns:a="http://schemas.openxmlformats.org/drawingml/2006/main" xmlns:r="http://schemas.openxmlformats.org/officeDocument/2006/relationships" xmlns:p="http://schemas.openxmlformats.org/presentationml/2006/main">
         <p:nvGraphicFramePr>
-          <p:cNvPr id="759875522" name=""/>
+          <p:cNvPr id="337723402" name=""/>
           <p:cNvGraphicFramePr>
             <a:graphicFrameLocks noGrp="true"/>
           </p:cNvGraphicFramePr>

--- a/assets/template-pptx.pptx
+++ b/assets/template-pptx.pptx
@@ -5813,7 +5813,7 @@
       </p:sp>
       <p:graphicFrame xmlns:a="http://schemas.openxmlformats.org/drawingml/2006/main" xmlns:r="http://schemas.openxmlformats.org/officeDocument/2006/relationships" xmlns:p="http://schemas.openxmlformats.org/presentationml/2006/main">
         <p:nvGraphicFramePr>
-          <p:cNvPr id="337723402" name=""/>
+          <p:cNvPr id="827200349" name=""/>
           <p:cNvGraphicFramePr>
             <a:graphicFrameLocks noGrp="true"/>
           </p:cNvGraphicFramePr>

--- a/assets/template-pptx.pptx
+++ b/assets/template-pptx.pptx
@@ -5813,7 +5813,7 @@
       </p:sp>
       <p:graphicFrame xmlns:a="http://schemas.openxmlformats.org/drawingml/2006/main" xmlns:r="http://schemas.openxmlformats.org/officeDocument/2006/relationships" xmlns:p="http://schemas.openxmlformats.org/presentationml/2006/main">
         <p:nvGraphicFramePr>
-          <p:cNvPr id="827200349" name=""/>
+          <p:cNvPr id="718899566" name=""/>
           <p:cNvGraphicFramePr>
             <a:graphicFrameLocks noGrp="true"/>
           </p:cNvGraphicFramePr>

--- a/assets/template-pptx.pptx
+++ b/assets/template-pptx.pptx
@@ -5813,7 +5813,7 @@
       </p:sp>
       <p:graphicFrame xmlns:a="http://schemas.openxmlformats.org/drawingml/2006/main" xmlns:r="http://schemas.openxmlformats.org/officeDocument/2006/relationships" xmlns:p="http://schemas.openxmlformats.org/presentationml/2006/main">
         <p:nvGraphicFramePr>
-          <p:cNvPr id="718899566" name=""/>
+          <p:cNvPr id="402919132" name=""/>
           <p:cNvGraphicFramePr>
             <a:graphicFrameLocks noGrp="true"/>
           </p:cNvGraphicFramePr>

--- a/assets/template-pptx.pptx
+++ b/assets/template-pptx.pptx
@@ -5813,7 +5813,7 @@
       </p:sp>
       <p:graphicFrame xmlns:a="http://schemas.openxmlformats.org/drawingml/2006/main" xmlns:r="http://schemas.openxmlformats.org/officeDocument/2006/relationships" xmlns:p="http://schemas.openxmlformats.org/presentationml/2006/main">
         <p:nvGraphicFramePr>
-          <p:cNvPr id="402919132" name=""/>
+          <p:cNvPr id="744295962" name=""/>
           <p:cNvGraphicFramePr>
             <a:graphicFrameLocks noGrp="true"/>
           </p:cNvGraphicFramePr>

--- a/assets/template-pptx.pptx
+++ b/assets/template-pptx.pptx
@@ -5813,7 +5813,7 @@
       </p:sp>
       <p:graphicFrame xmlns:a="http://schemas.openxmlformats.org/drawingml/2006/main" xmlns:r="http://schemas.openxmlformats.org/officeDocument/2006/relationships" xmlns:p="http://schemas.openxmlformats.org/presentationml/2006/main">
         <p:nvGraphicFramePr>
-          <p:cNvPr id="744295962" name=""/>
+          <p:cNvPr id="312794661" name=""/>
           <p:cNvGraphicFramePr>
             <a:graphicFrameLocks noGrp="true"/>
           </p:cNvGraphicFramePr>

--- a/assets/template-pptx.pptx
+++ b/assets/template-pptx.pptx
@@ -5813,7 +5813,7 @@
       </p:sp>
       <p:graphicFrame xmlns:a="http://schemas.openxmlformats.org/drawingml/2006/main" xmlns:r="http://schemas.openxmlformats.org/officeDocument/2006/relationships" xmlns:p="http://schemas.openxmlformats.org/presentationml/2006/main">
         <p:nvGraphicFramePr>
-          <p:cNvPr id="312794661" name=""/>
+          <p:cNvPr id="197776579" name=""/>
           <p:cNvGraphicFramePr>
             <a:graphicFrameLocks noGrp="true"/>
           </p:cNvGraphicFramePr>

--- a/assets/template-pptx.pptx
+++ b/assets/template-pptx.pptx
@@ -5813,7 +5813,7 @@
       </p:sp>
       <p:graphicFrame xmlns:a="http://schemas.openxmlformats.org/drawingml/2006/main" xmlns:r="http://schemas.openxmlformats.org/officeDocument/2006/relationships" xmlns:p="http://schemas.openxmlformats.org/presentationml/2006/main">
         <p:nvGraphicFramePr>
-          <p:cNvPr id="197776579" name=""/>
+          <p:cNvPr id="702403814" name=""/>
           <p:cNvGraphicFramePr>
             <a:graphicFrameLocks noGrp="true"/>
           </p:cNvGraphicFramePr>

--- a/assets/template-pptx.pptx
+++ b/assets/template-pptx.pptx
@@ -5813,7 +5813,7 @@
       </p:sp>
       <p:graphicFrame xmlns:a="http://schemas.openxmlformats.org/drawingml/2006/main" xmlns:r="http://schemas.openxmlformats.org/officeDocument/2006/relationships" xmlns:p="http://schemas.openxmlformats.org/presentationml/2006/main">
         <p:nvGraphicFramePr>
-          <p:cNvPr id="702403814" name=""/>
+          <p:cNvPr id="562975928" name=""/>
           <p:cNvGraphicFramePr>
             <a:graphicFrameLocks noGrp="true"/>
           </p:cNvGraphicFramePr>

--- a/assets/template-pptx.pptx
+++ b/assets/template-pptx.pptx
@@ -5813,7 +5813,7 @@
       </p:sp>
       <p:graphicFrame xmlns:a="http://schemas.openxmlformats.org/drawingml/2006/main" xmlns:r="http://schemas.openxmlformats.org/officeDocument/2006/relationships" xmlns:p="http://schemas.openxmlformats.org/presentationml/2006/main">
         <p:nvGraphicFramePr>
-          <p:cNvPr id="562975928" name=""/>
+          <p:cNvPr id="698643977" name=""/>
           <p:cNvGraphicFramePr>
             <a:graphicFrameLocks noGrp="true"/>
           </p:cNvGraphicFramePr>

--- a/assets/template-pptx.pptx
+++ b/assets/template-pptx.pptx
@@ -5813,7 +5813,7 @@
       </p:sp>
       <p:graphicFrame xmlns:a="http://schemas.openxmlformats.org/drawingml/2006/main" xmlns:r="http://schemas.openxmlformats.org/officeDocument/2006/relationships" xmlns:p="http://schemas.openxmlformats.org/presentationml/2006/main">
         <p:nvGraphicFramePr>
-          <p:cNvPr id="698643977" name=""/>
+          <p:cNvPr id="298908306" name=""/>
           <p:cNvGraphicFramePr>
             <a:graphicFrameLocks noGrp="true"/>
           </p:cNvGraphicFramePr>

--- a/assets/template-pptx.pptx
+++ b/assets/template-pptx.pptx
@@ -5813,7 +5813,7 @@
       </p:sp>
       <p:graphicFrame xmlns:a="http://schemas.openxmlformats.org/drawingml/2006/main" xmlns:r="http://schemas.openxmlformats.org/officeDocument/2006/relationships" xmlns:p="http://schemas.openxmlformats.org/presentationml/2006/main">
         <p:nvGraphicFramePr>
-          <p:cNvPr id="298908306" name=""/>
+          <p:cNvPr id="493066623" name=""/>
           <p:cNvGraphicFramePr>
             <a:graphicFrameLocks noGrp="true"/>
           </p:cNvGraphicFramePr>

--- a/assets/template-pptx.pptx
+++ b/assets/template-pptx.pptx
@@ -5813,7 +5813,7 @@
       </p:sp>
       <p:graphicFrame xmlns:a="http://schemas.openxmlformats.org/drawingml/2006/main" xmlns:r="http://schemas.openxmlformats.org/officeDocument/2006/relationships" xmlns:p="http://schemas.openxmlformats.org/presentationml/2006/main">
         <p:nvGraphicFramePr>
-          <p:cNvPr id="493066623" name=""/>
+          <p:cNvPr id="388435035" name=""/>
           <p:cNvGraphicFramePr>
             <a:graphicFrameLocks noGrp="true"/>
           </p:cNvGraphicFramePr>

--- a/assets/template-pptx.pptx
+++ b/assets/template-pptx.pptx
@@ -5813,7 +5813,7 @@
       </p:sp>
       <p:graphicFrame xmlns:a="http://schemas.openxmlformats.org/drawingml/2006/main" xmlns:r="http://schemas.openxmlformats.org/officeDocument/2006/relationships" xmlns:p="http://schemas.openxmlformats.org/presentationml/2006/main">
         <p:nvGraphicFramePr>
-          <p:cNvPr id="388435035" name=""/>
+          <p:cNvPr id="869893286" name=""/>
           <p:cNvGraphicFramePr>
             <a:graphicFrameLocks noGrp="true"/>
           </p:cNvGraphicFramePr>

--- a/assets/template-pptx.pptx
+++ b/assets/template-pptx.pptx
@@ -5813,7 +5813,7 @@
       </p:sp>
       <p:graphicFrame xmlns:a="http://schemas.openxmlformats.org/drawingml/2006/main" xmlns:r="http://schemas.openxmlformats.org/officeDocument/2006/relationships" xmlns:p="http://schemas.openxmlformats.org/presentationml/2006/main">
         <p:nvGraphicFramePr>
-          <p:cNvPr id="869893286" name=""/>
+          <p:cNvPr id="137443898" name=""/>
           <p:cNvGraphicFramePr>
             <a:graphicFrameLocks noGrp="true"/>
           </p:cNvGraphicFramePr>

--- a/assets/template-pptx.pptx
+++ b/assets/template-pptx.pptx
@@ -5813,7 +5813,7 @@
       </p:sp>
       <p:graphicFrame xmlns:a="http://schemas.openxmlformats.org/drawingml/2006/main" xmlns:r="http://schemas.openxmlformats.org/officeDocument/2006/relationships" xmlns:p="http://schemas.openxmlformats.org/presentationml/2006/main">
         <p:nvGraphicFramePr>
-          <p:cNvPr id="137443898" name=""/>
+          <p:cNvPr id="562792145" name=""/>
           <p:cNvGraphicFramePr>
             <a:graphicFrameLocks noGrp="true"/>
           </p:cNvGraphicFramePr>

--- a/assets/template-pptx.pptx
+++ b/assets/template-pptx.pptx
@@ -5813,7 +5813,7 @@
       </p:sp>
       <p:graphicFrame xmlns:a="http://schemas.openxmlformats.org/drawingml/2006/main" xmlns:r="http://schemas.openxmlformats.org/officeDocument/2006/relationships" xmlns:p="http://schemas.openxmlformats.org/presentationml/2006/main">
         <p:nvGraphicFramePr>
-          <p:cNvPr id="562792145" name=""/>
+          <p:cNvPr id="709022335" name=""/>
           <p:cNvGraphicFramePr>
             <a:graphicFrameLocks noGrp="true"/>
           </p:cNvGraphicFramePr>

--- a/assets/template-pptx.pptx
+++ b/assets/template-pptx.pptx
@@ -5813,7 +5813,7 @@
       </p:sp>
       <p:graphicFrame xmlns:a="http://schemas.openxmlformats.org/drawingml/2006/main" xmlns:r="http://schemas.openxmlformats.org/officeDocument/2006/relationships" xmlns:p="http://schemas.openxmlformats.org/presentationml/2006/main">
         <p:nvGraphicFramePr>
-          <p:cNvPr id="709022335" name=""/>
+          <p:cNvPr id="308276151" name=""/>
           <p:cNvGraphicFramePr>
             <a:graphicFrameLocks noGrp="true"/>
           </p:cNvGraphicFramePr>

--- a/assets/template-pptx.pptx
+++ b/assets/template-pptx.pptx
@@ -5813,7 +5813,7 @@
       </p:sp>
       <p:graphicFrame xmlns:a="http://schemas.openxmlformats.org/drawingml/2006/main" xmlns:r="http://schemas.openxmlformats.org/officeDocument/2006/relationships" xmlns:p="http://schemas.openxmlformats.org/presentationml/2006/main">
         <p:nvGraphicFramePr>
-          <p:cNvPr id="308276151" name=""/>
+          <p:cNvPr id="929455341" name=""/>
           <p:cNvGraphicFramePr>
             <a:graphicFrameLocks noGrp="true"/>
           </p:cNvGraphicFramePr>

--- a/assets/template-pptx.pptx
+++ b/assets/template-pptx.pptx
@@ -5813,7 +5813,7 @@
       </p:sp>
       <p:graphicFrame xmlns:a="http://schemas.openxmlformats.org/drawingml/2006/main" xmlns:r="http://schemas.openxmlformats.org/officeDocument/2006/relationships" xmlns:p="http://schemas.openxmlformats.org/presentationml/2006/main">
         <p:nvGraphicFramePr>
-          <p:cNvPr id="929455341" name=""/>
+          <p:cNvPr id="82279950" name=""/>
           <p:cNvGraphicFramePr>
             <a:graphicFrameLocks noGrp="true"/>
           </p:cNvGraphicFramePr>

--- a/assets/template-pptx.pptx
+++ b/assets/template-pptx.pptx
@@ -5813,7 +5813,7 @@
       </p:sp>
       <p:graphicFrame xmlns:a="http://schemas.openxmlformats.org/drawingml/2006/main" xmlns:r="http://schemas.openxmlformats.org/officeDocument/2006/relationships" xmlns:p="http://schemas.openxmlformats.org/presentationml/2006/main">
         <p:nvGraphicFramePr>
-          <p:cNvPr id="82279950" name=""/>
+          <p:cNvPr id="696790318" name=""/>
           <p:cNvGraphicFramePr>
             <a:graphicFrameLocks noGrp="true"/>
           </p:cNvGraphicFramePr>

--- a/assets/template-pptx.pptx
+++ b/assets/template-pptx.pptx
@@ -5813,7 +5813,7 @@
       </p:sp>
       <p:graphicFrame xmlns:a="http://schemas.openxmlformats.org/drawingml/2006/main" xmlns:r="http://schemas.openxmlformats.org/officeDocument/2006/relationships" xmlns:p="http://schemas.openxmlformats.org/presentationml/2006/main">
         <p:nvGraphicFramePr>
-          <p:cNvPr id="696790318" name=""/>
+          <p:cNvPr id="811422274" name=""/>
           <p:cNvGraphicFramePr>
             <a:graphicFrameLocks noGrp="true"/>
           </p:cNvGraphicFramePr>

--- a/assets/template-pptx.pptx
+++ b/assets/template-pptx.pptx
@@ -5813,7 +5813,7 @@
       </p:sp>
       <p:graphicFrame xmlns:a="http://schemas.openxmlformats.org/drawingml/2006/main" xmlns:r="http://schemas.openxmlformats.org/officeDocument/2006/relationships" xmlns:p="http://schemas.openxmlformats.org/presentationml/2006/main">
         <p:nvGraphicFramePr>
-          <p:cNvPr id="811422274" name=""/>
+          <p:cNvPr id="692545006" name=""/>
           <p:cNvGraphicFramePr>
             <a:graphicFrameLocks noGrp="true"/>
           </p:cNvGraphicFramePr>

--- a/assets/template-pptx.pptx
+++ b/assets/template-pptx.pptx
@@ -5813,7 +5813,7 @@
       </p:sp>
       <p:graphicFrame xmlns:a="http://schemas.openxmlformats.org/drawingml/2006/main" xmlns:r="http://schemas.openxmlformats.org/officeDocument/2006/relationships" xmlns:p="http://schemas.openxmlformats.org/presentationml/2006/main">
         <p:nvGraphicFramePr>
-          <p:cNvPr id="692545006" name=""/>
+          <p:cNvPr id="415551765" name=""/>
           <p:cNvGraphicFramePr>
             <a:graphicFrameLocks noGrp="true"/>
           </p:cNvGraphicFramePr>

--- a/assets/template-pptx.pptx
+++ b/assets/template-pptx.pptx
@@ -5813,7 +5813,7 @@
       </p:sp>
       <p:graphicFrame xmlns:a="http://schemas.openxmlformats.org/drawingml/2006/main" xmlns:r="http://schemas.openxmlformats.org/officeDocument/2006/relationships" xmlns:p="http://schemas.openxmlformats.org/presentationml/2006/main">
         <p:nvGraphicFramePr>
-          <p:cNvPr id="415551765" name=""/>
+          <p:cNvPr id="783777952" name=""/>
           <p:cNvGraphicFramePr>
             <a:graphicFrameLocks noGrp="true"/>
           </p:cNvGraphicFramePr>
